--- a/slides/Algorithm and data structure.pptx
+++ b/slides/Algorithm and data structure.pptx
@@ -20,6 +20,11 @@
     <p:sldId id="268" r:id="rId14"/>
     <p:sldId id="269" r:id="rId15"/>
     <p:sldId id="270" r:id="rId16"/>
+    <p:sldId id="271" r:id="rId17"/>
+    <p:sldId id="272" r:id="rId18"/>
+    <p:sldId id="273" r:id="rId19"/>
+    <p:sldId id="274" r:id="rId20"/>
+    <p:sldId id="275" r:id="rId21"/>
   </p:sldIdLst>
   <p:sldSz cx="12192000" cy="6858000"/>
   <p:notesSz cx="6858000" cy="9144000"/>
@@ -312,7 +317,7 @@
           <a:p>
             <a:fld id="{27927CA0-FEE3-4C5A-B22A-DB866EE6502D}" type="datetimeFigureOut">
               <a:rPr lang="en-US" smtClean="0"/>
-              <a:t>5/5/2026</a:t>
+              <a:t>5/12/2026</a:t>
             </a:fld>
             <a:endParaRPr lang="en-US"/>
           </a:p>
@@ -587,7 +592,7 @@
           <a:p>
             <a:fld id="{27927CA0-FEE3-4C5A-B22A-DB866EE6502D}" type="datetimeFigureOut">
               <a:rPr lang="en-US" smtClean="0"/>
-              <a:t>5/5/2026</a:t>
+              <a:t>5/12/2026</a:t>
             </a:fld>
             <a:endParaRPr lang="en-US"/>
           </a:p>
@@ -781,7 +786,7 @@
           <a:p>
             <a:fld id="{27927CA0-FEE3-4C5A-B22A-DB866EE6502D}" type="datetimeFigureOut">
               <a:rPr lang="en-US" smtClean="0"/>
-              <a:t>5/5/2026</a:t>
+              <a:t>5/12/2026</a:t>
             </a:fld>
             <a:endParaRPr lang="en-US"/>
           </a:p>
@@ -1054,7 +1059,7 @@
           <a:p>
             <a:fld id="{27927CA0-FEE3-4C5A-B22A-DB866EE6502D}" type="datetimeFigureOut">
               <a:rPr lang="en-US" smtClean="0"/>
-              <a:t>5/5/2026</a:t>
+              <a:t>5/12/2026</a:t>
             </a:fld>
             <a:endParaRPr lang="en-US"/>
           </a:p>
@@ -1395,7 +1400,7 @@
           <a:p>
             <a:fld id="{27927CA0-FEE3-4C5A-B22A-DB866EE6502D}" type="datetimeFigureOut">
               <a:rPr lang="en-US" smtClean="0"/>
-              <a:t>5/5/2026</a:t>
+              <a:t>5/12/2026</a:t>
             </a:fld>
             <a:endParaRPr lang="en-US"/>
           </a:p>
@@ -2018,7 +2023,7 @@
           <a:p>
             <a:fld id="{27927CA0-FEE3-4C5A-B22A-DB866EE6502D}" type="datetimeFigureOut">
               <a:rPr lang="en-US" smtClean="0"/>
-              <a:t>5/5/2026</a:t>
+              <a:t>5/12/2026</a:t>
             </a:fld>
             <a:endParaRPr lang="en-US"/>
           </a:p>
@@ -2878,7 +2883,7 @@
           <a:p>
             <a:fld id="{27927CA0-FEE3-4C5A-B22A-DB866EE6502D}" type="datetimeFigureOut">
               <a:rPr lang="en-US" smtClean="0"/>
-              <a:t>5/5/2026</a:t>
+              <a:t>5/12/2026</a:t>
             </a:fld>
             <a:endParaRPr lang="en-US"/>
           </a:p>
@@ -3048,7 +3053,7 @@
           <a:p>
             <a:fld id="{27927CA0-FEE3-4C5A-B22A-DB866EE6502D}" type="datetimeFigureOut">
               <a:rPr lang="en-US" smtClean="0"/>
-              <a:t>5/5/2026</a:t>
+              <a:t>5/12/2026</a:t>
             </a:fld>
             <a:endParaRPr lang="en-US"/>
           </a:p>
@@ -3228,7 +3233,7 @@
           <a:p>
             <a:fld id="{27927CA0-FEE3-4C5A-B22A-DB866EE6502D}" type="datetimeFigureOut">
               <a:rPr lang="en-US" smtClean="0"/>
-              <a:t>5/5/2026</a:t>
+              <a:t>5/12/2026</a:t>
             </a:fld>
             <a:endParaRPr lang="en-US"/>
           </a:p>
@@ -3398,7 +3403,7 @@
           <a:p>
             <a:fld id="{27927CA0-FEE3-4C5A-B22A-DB866EE6502D}" type="datetimeFigureOut">
               <a:rPr lang="en-US" smtClean="0"/>
-              <a:t>5/5/2026</a:t>
+              <a:t>5/12/2026</a:t>
             </a:fld>
             <a:endParaRPr lang="en-US"/>
           </a:p>
@@ -3645,7 +3650,7 @@
           <a:p>
             <a:fld id="{27927CA0-FEE3-4C5A-B22A-DB866EE6502D}" type="datetimeFigureOut">
               <a:rPr lang="en-US" smtClean="0"/>
-              <a:t>5/5/2026</a:t>
+              <a:t>5/12/2026</a:t>
             </a:fld>
             <a:endParaRPr lang="en-US"/>
           </a:p>
@@ -3937,7 +3942,7 @@
           <a:p>
             <a:fld id="{27927CA0-FEE3-4C5A-B22A-DB866EE6502D}" type="datetimeFigureOut">
               <a:rPr lang="en-US" smtClean="0"/>
-              <a:t>5/5/2026</a:t>
+              <a:t>5/12/2026</a:t>
             </a:fld>
             <a:endParaRPr lang="en-US"/>
           </a:p>
@@ -4381,7 +4386,7 @@
           <a:p>
             <a:fld id="{27927CA0-FEE3-4C5A-B22A-DB866EE6502D}" type="datetimeFigureOut">
               <a:rPr lang="en-US" smtClean="0"/>
-              <a:t>5/5/2026</a:t>
+              <a:t>5/12/2026</a:t>
             </a:fld>
             <a:endParaRPr lang="en-US"/>
           </a:p>
@@ -4499,7 +4504,7 @@
           <a:p>
             <a:fld id="{27927CA0-FEE3-4C5A-B22A-DB866EE6502D}" type="datetimeFigureOut">
               <a:rPr lang="en-US" smtClean="0"/>
-              <a:t>5/5/2026</a:t>
+              <a:t>5/12/2026</a:t>
             </a:fld>
             <a:endParaRPr lang="en-US"/>
           </a:p>
@@ -4594,7 +4599,7 @@
           <a:p>
             <a:fld id="{27927CA0-FEE3-4C5A-B22A-DB866EE6502D}" type="datetimeFigureOut">
               <a:rPr lang="en-US" smtClean="0"/>
-              <a:t>5/5/2026</a:t>
+              <a:t>5/12/2026</a:t>
             </a:fld>
             <a:endParaRPr lang="en-US"/>
           </a:p>
@@ -4873,7 +4878,7 @@
           <a:p>
             <a:fld id="{27927CA0-FEE3-4C5A-B22A-DB866EE6502D}" type="datetimeFigureOut">
               <a:rPr lang="en-US" smtClean="0"/>
-              <a:t>5/5/2026</a:t>
+              <a:t>5/12/2026</a:t>
             </a:fld>
             <a:endParaRPr lang="en-US"/>
           </a:p>
@@ -5148,7 +5153,7 @@
           <a:p>
             <a:fld id="{27927CA0-FEE3-4C5A-B22A-DB866EE6502D}" type="datetimeFigureOut">
               <a:rPr lang="en-US" smtClean="0"/>
-              <a:t>5/5/2026</a:t>
+              <a:t>5/12/2026</a:t>
             </a:fld>
             <a:endParaRPr lang="en-US"/>
           </a:p>
@@ -5577,7 +5582,7 @@
           <a:p>
             <a:fld id="{27927CA0-FEE3-4C5A-B22A-DB866EE6502D}" type="datetimeFigureOut">
               <a:rPr lang="en-US" smtClean="0"/>
-              <a:t>5/5/2026</a:t>
+              <a:t>5/12/2026</a:t>
             </a:fld>
             <a:endParaRPr lang="en-US"/>
           </a:p>
@@ -7255,6 +7260,1490 @@
 </p:sld>
 </file>
 
+<file path=ppt/slides/slide16.xml><?xml version="1.0" encoding="utf-8"?>
+<p:sld xmlns:a="http://schemas.openxmlformats.org/drawingml/2006/main" xmlns:r="http://schemas.openxmlformats.org/officeDocument/2006/relationships" xmlns:p="http://schemas.openxmlformats.org/presentationml/2006/main">
+  <p:cSld>
+    <p:spTree>
+      <p:nvGrpSpPr>
+        <p:cNvPr id="1" name=""/>
+        <p:cNvGrpSpPr/>
+        <p:nvPr/>
+      </p:nvGrpSpPr>
+      <p:grpSpPr>
+        <a:xfrm>
+          <a:off x="0" y="0"/>
+          <a:ext cx="0" cy="0"/>
+          <a:chOff x="0" y="0"/>
+          <a:chExt cx="0" cy="0"/>
+        </a:xfrm>
+      </p:grpSpPr>
+      <p:sp>
+        <p:nvSpPr>
+          <p:cNvPr id="2" name="Title 1">
+            <a:extLst>
+              <a:ext uri="{FF2B5EF4-FFF2-40B4-BE49-F238E27FC236}">
+                <a16:creationId xmlns:a16="http://schemas.microsoft.com/office/drawing/2014/main" id="{90653419-79E1-4F25-965C-9F659E4AC490}"/>
+              </a:ext>
+            </a:extLst>
+          </p:cNvPr>
+          <p:cNvSpPr>
+            <a:spLocks noGrp="1"/>
+          </p:cNvSpPr>
+          <p:nvPr>
+            <p:ph type="title"/>
+          </p:nvPr>
+        </p:nvSpPr>
+        <p:spPr/>
+        <p:txBody>
+          <a:bodyPr/>
+          <a:lstStyle/>
+          <a:p>
+            <a:pPr algn="ctr"/>
+            <a:r>
+              <a:rPr lang="en-US" sz="6600" b="1" dirty="0"/>
+              <a:t>Abstraction</a:t>
+            </a:r>
+            <a:endParaRPr lang="en-US" sz="6600" dirty="0"/>
+          </a:p>
+        </p:txBody>
+      </p:sp>
+      <p:sp>
+        <p:nvSpPr>
+          <p:cNvPr id="3" name="Content Placeholder 2">
+            <a:extLst>
+              <a:ext uri="{FF2B5EF4-FFF2-40B4-BE49-F238E27FC236}">
+                <a16:creationId xmlns:a16="http://schemas.microsoft.com/office/drawing/2014/main" id="{14D90BEC-DF18-4776-B1A5-08405568CE39}"/>
+              </a:ext>
+            </a:extLst>
+          </p:cNvPr>
+          <p:cNvSpPr>
+            <a:spLocks noGrp="1"/>
+          </p:cNvSpPr>
+          <p:nvPr>
+            <p:ph idx="1"/>
+          </p:nvPr>
+        </p:nvSpPr>
+        <p:spPr>
+          <a:xfrm>
+            <a:off x="228600" y="1524000"/>
+            <a:ext cx="11404600" cy="5334000"/>
+          </a:xfrm>
+        </p:spPr>
+        <p:txBody>
+          <a:bodyPr>
+            <a:normAutofit/>
+          </a:bodyPr>
+          <a:lstStyle/>
+          <a:p>
+            <a:r>
+              <a:rPr lang="en-US" sz="2800" dirty="0"/>
+              <a:t>Abstraction is the process of hiding complex implementation details and showing only the essential features of the object. It's about simplifying a complex reality by modeling classes appropriate to the problem. This is a key step in algorithmic thinking, as it allows you to create a more general-purpose algorithm and focus on the bigger picture.</a:t>
+            </a:r>
+          </a:p>
+          <a:p>
+            <a:r>
+              <a:rPr lang="en-US" sz="2800" dirty="0"/>
+              <a:t>When you're abstracting a problem, you identify the essential features and ignore the irrelevant ones. You create a simplified model of the problem that captures the necessary characteristics.</a:t>
+            </a:r>
+          </a:p>
+          <a:p>
+            <a:endParaRPr lang="en-US" sz="2800" dirty="0"/>
+          </a:p>
+        </p:txBody>
+      </p:sp>
+    </p:spTree>
+    <p:extLst>
+      <p:ext uri="{BB962C8B-B14F-4D97-AF65-F5344CB8AC3E}">
+        <p14:creationId xmlns:p14="http://schemas.microsoft.com/office/powerpoint/2010/main" val="2936678853"/>
+      </p:ext>
+    </p:extLst>
+  </p:cSld>
+  <p:clrMapOvr>
+    <a:masterClrMapping/>
+  </p:clrMapOvr>
+</p:sld>
+</file>
+
+<file path=ppt/slides/slide17.xml><?xml version="1.0" encoding="utf-8"?>
+<p:sld xmlns:a="http://schemas.openxmlformats.org/drawingml/2006/main" xmlns:r="http://schemas.openxmlformats.org/officeDocument/2006/relationships" xmlns:p="http://schemas.openxmlformats.org/presentationml/2006/main">
+  <p:cSld>
+    <p:spTree>
+      <p:nvGrpSpPr>
+        <p:cNvPr id="1" name=""/>
+        <p:cNvGrpSpPr/>
+        <p:nvPr/>
+      </p:nvGrpSpPr>
+      <p:grpSpPr>
+        <a:xfrm>
+          <a:off x="0" y="0"/>
+          <a:ext cx="0" cy="0"/>
+          <a:chOff x="0" y="0"/>
+          <a:chExt cx="0" cy="0"/>
+        </a:xfrm>
+      </p:grpSpPr>
+      <p:sp>
+        <p:nvSpPr>
+          <p:cNvPr id="2" name="Title 1">
+            <a:extLst>
+              <a:ext uri="{FF2B5EF4-FFF2-40B4-BE49-F238E27FC236}">
+                <a16:creationId xmlns:a16="http://schemas.microsoft.com/office/drawing/2014/main" id="{0AFA8EE7-4AA9-4101-A8B1-DF14F69A87F7}"/>
+              </a:ext>
+            </a:extLst>
+          </p:cNvPr>
+          <p:cNvSpPr>
+            <a:spLocks noGrp="1"/>
+          </p:cNvSpPr>
+          <p:nvPr>
+            <p:ph type="title"/>
+          </p:nvPr>
+        </p:nvSpPr>
+        <p:spPr/>
+        <p:txBody>
+          <a:bodyPr/>
+          <a:lstStyle/>
+          <a:p>
+            <a:r>
+              <a:rPr lang="en-US" b="1" dirty="0"/>
+              <a:t>Practical Example: Driving a Car</a:t>
+            </a:r>
+            <a:endParaRPr lang="en-US" dirty="0"/>
+          </a:p>
+        </p:txBody>
+      </p:sp>
+      <p:sp>
+        <p:nvSpPr>
+          <p:cNvPr id="3" name="Content Placeholder 2">
+            <a:extLst>
+              <a:ext uri="{FF2B5EF4-FFF2-40B4-BE49-F238E27FC236}">
+                <a16:creationId xmlns:a16="http://schemas.microsoft.com/office/drawing/2014/main" id="{785967CD-5372-47C3-950F-382534F31A5D}"/>
+              </a:ext>
+            </a:extLst>
+          </p:cNvPr>
+          <p:cNvSpPr>
+            <a:spLocks noGrp="1"/>
+          </p:cNvSpPr>
+          <p:nvPr>
+            <p:ph idx="1"/>
+          </p:nvPr>
+        </p:nvSpPr>
+        <p:spPr>
+          <a:xfrm>
+            <a:off x="215900" y="1270000"/>
+            <a:ext cx="11658600" cy="5473700"/>
+          </a:xfrm>
+        </p:spPr>
+        <p:txBody>
+          <a:bodyPr>
+            <a:normAutofit fontScale="92500"/>
+          </a:bodyPr>
+          <a:lstStyle/>
+          <a:p>
+            <a:pPr marL="0" indent="0">
+              <a:buNone/>
+            </a:pPr>
+            <a:r>
+              <a:rPr lang="en-US" sz="2800" dirty="0"/>
+              <a:t>A perfect real-world example of abstraction is driving a car.</a:t>
+            </a:r>
+          </a:p>
+          <a:p>
+            <a:pPr marL="0" indent="0">
+              <a:buNone/>
+            </a:pPr>
+            <a:r>
+              <a:rPr lang="en-US" sz="2800" dirty="0"/>
+              <a:t>To drive a car, you don't need to know how the engine works, how the transmission system shifts gears, or how the fuel injection system operates. The car's designers have hidden these complex details.</a:t>
+            </a:r>
+          </a:p>
+          <a:p>
+            <a:pPr marL="0" indent="0">
+              <a:buNone/>
+            </a:pPr>
+            <a:r>
+              <a:rPr lang="en-US" sz="2800" dirty="0"/>
+              <a:t>Instead, you interact with a simplified interface:</a:t>
+            </a:r>
+          </a:p>
+          <a:p>
+            <a:pPr>
+              <a:buFont typeface="Arial" panose="020B0604020202020204" pitchFamily="34" charset="0"/>
+              <a:buChar char="•"/>
+            </a:pPr>
+            <a:r>
+              <a:rPr lang="en-US" sz="2800" b="1" dirty="0"/>
+              <a:t>Steering wheel:</a:t>
+            </a:r>
+            <a:r>
+              <a:rPr lang="en-US" sz="2800" dirty="0"/>
+              <a:t> to turn.</a:t>
+            </a:r>
+          </a:p>
+          <a:p>
+            <a:pPr>
+              <a:buFont typeface="Arial" panose="020B0604020202020204" pitchFamily="34" charset="0"/>
+              <a:buChar char="•"/>
+            </a:pPr>
+            <a:r>
+              <a:rPr lang="en-US" sz="2800" b="1" dirty="0"/>
+              <a:t>Accelerator pedal:</a:t>
+            </a:r>
+            <a:r>
+              <a:rPr lang="en-US" sz="2800" dirty="0"/>
+              <a:t> to go faster.</a:t>
+            </a:r>
+          </a:p>
+          <a:p>
+            <a:pPr>
+              <a:buFont typeface="Arial" panose="020B0604020202020204" pitchFamily="34" charset="0"/>
+              <a:buChar char="•"/>
+            </a:pPr>
+            <a:r>
+              <a:rPr lang="en-US" sz="2800" b="1" dirty="0"/>
+              <a:t>Brake pedal:</a:t>
+            </a:r>
+            <a:r>
+              <a:rPr lang="en-US" sz="2800" dirty="0"/>
+              <a:t> to slow down.</a:t>
+            </a:r>
+          </a:p>
+          <a:p>
+            <a:r>
+              <a:rPr lang="en-US" sz="2800" dirty="0"/>
+              <a:t>This abstraction allows you to use the car for its main purpose—transportation—without being an expert mechanic. You focus on the "what" (driving) rather than the "how" (the internal mechanics).</a:t>
+            </a:r>
+          </a:p>
+          <a:p>
+            <a:endParaRPr lang="en-US" sz="2800" dirty="0"/>
+          </a:p>
+        </p:txBody>
+      </p:sp>
+    </p:spTree>
+    <p:extLst>
+      <p:ext uri="{BB962C8B-B14F-4D97-AF65-F5344CB8AC3E}">
+        <p14:creationId xmlns:p14="http://schemas.microsoft.com/office/powerpoint/2010/main" val="3452122974"/>
+      </p:ext>
+    </p:extLst>
+  </p:cSld>
+  <p:clrMapOvr>
+    <a:masterClrMapping/>
+  </p:clrMapOvr>
+</p:sld>
+</file>
+
+<file path=ppt/slides/slide18.xml><?xml version="1.0" encoding="utf-8"?>
+<p:sld xmlns:a="http://schemas.openxmlformats.org/drawingml/2006/main" xmlns:r="http://schemas.openxmlformats.org/officeDocument/2006/relationships" xmlns:p="http://schemas.openxmlformats.org/presentationml/2006/main">
+  <p:cSld>
+    <p:spTree>
+      <p:nvGrpSpPr>
+        <p:cNvPr id="1" name=""/>
+        <p:cNvGrpSpPr/>
+        <p:nvPr/>
+      </p:nvGrpSpPr>
+      <p:grpSpPr>
+        <a:xfrm>
+          <a:off x="0" y="0"/>
+          <a:ext cx="0" cy="0"/>
+          <a:chOff x="0" y="0"/>
+          <a:chExt cx="0" cy="0"/>
+        </a:xfrm>
+      </p:grpSpPr>
+      <p:sp>
+        <p:nvSpPr>
+          <p:cNvPr id="2" name="Title 1">
+            <a:extLst>
+              <a:ext uri="{FF2B5EF4-FFF2-40B4-BE49-F238E27FC236}">
+                <a16:creationId xmlns:a16="http://schemas.microsoft.com/office/drawing/2014/main" id="{A29EF346-C986-4859-8CCF-F9FB9BB79B6F}"/>
+              </a:ext>
+            </a:extLst>
+          </p:cNvPr>
+          <p:cNvSpPr>
+            <a:spLocks noGrp="1"/>
+          </p:cNvSpPr>
+          <p:nvPr>
+            <p:ph type="title"/>
+          </p:nvPr>
+        </p:nvSpPr>
+        <p:spPr>
+          <a:xfrm>
+            <a:off x="645130" y="452718"/>
+            <a:ext cx="9404723" cy="817282"/>
+          </a:xfrm>
+        </p:spPr>
+        <p:txBody>
+          <a:bodyPr/>
+          <a:lstStyle/>
+          <a:p>
+            <a:r>
+              <a:rPr lang="en-US" sz="3600" b="1" dirty="0"/>
+              <a:t>Python Program Example: A Car Class</a:t>
+            </a:r>
+            <a:endParaRPr lang="en-US" sz="3600" dirty="0"/>
+          </a:p>
+        </p:txBody>
+      </p:sp>
+      <p:sp>
+        <p:nvSpPr>
+          <p:cNvPr id="6" name="Rectangle 3">
+            <a:extLst>
+              <a:ext uri="{FF2B5EF4-FFF2-40B4-BE49-F238E27FC236}">
+                <a16:creationId xmlns:a16="http://schemas.microsoft.com/office/drawing/2014/main" id="{2CDE4E2C-D24F-4AF5-A17A-93C3AA962750}"/>
+              </a:ext>
+            </a:extLst>
+          </p:cNvPr>
+          <p:cNvSpPr>
+            <a:spLocks noGrp="1" noChangeArrowheads="1"/>
+          </p:cNvSpPr>
+          <p:nvPr>
+            <p:ph idx="1"/>
+          </p:nvPr>
+        </p:nvSpPr>
+        <p:spPr bwMode="auto">
+          <a:xfrm>
+            <a:off x="304800" y="2431007"/>
+            <a:ext cx="11658600" cy="4154984"/>
+          </a:xfrm>
+          <a:prstGeom prst="rect">
+            <a:avLst/>
+          </a:prstGeom>
+          <a:noFill/>
+          <a:ln>
+            <a:noFill/>
+          </a:ln>
+          <a:effectLst/>
+          <a:extLst>
+            <a:ext uri="{909E8E84-426E-40DD-AFC4-6F175D3DCCD1}">
+              <a14:hiddenFill xmlns:a14="http://schemas.microsoft.com/office/drawing/2010/main">
+                <a:solidFill>
+                  <a:schemeClr val="accent1"/>
+                </a:solidFill>
+              </a14:hiddenFill>
+            </a:ext>
+            <a:ext uri="{91240B29-F687-4F45-9708-019B960494DF}">
+              <a14:hiddenLine xmlns:a14="http://schemas.microsoft.com/office/drawing/2010/main" w="9525">
+                <a:solidFill>
+                  <a:schemeClr val="tx1"/>
+                </a:solidFill>
+                <a:miter lim="800000"/>
+                <a:headEnd/>
+                <a:tailEnd/>
+              </a14:hiddenLine>
+            </a:ext>
+            <a:ext uri="{AF507438-7753-43E0-B8FC-AC1667EBCBE1}">
+              <a14:hiddenEffects xmlns:a14="http://schemas.microsoft.com/office/drawing/2010/main">
+                <a:effectLst>
+                  <a:outerShdw dist="35921" dir="2700000" algn="ctr" rotWithShape="0">
+                    <a:schemeClr val="bg2"/>
+                  </a:outerShdw>
+                </a:effectLst>
+              </a14:hiddenEffects>
+            </a:ext>
+          </a:extLst>
+        </p:spPr>
+        <p:txBody>
+          <a:bodyPr vert="horz" wrap="square" lIns="91440" tIns="45720" rIns="91440" bIns="45720" numCol="1" anchor="ctr" anchorCtr="0" compatLnSpc="1">
+            <a:prstTxWarp prst="textNoShape">
+              <a:avLst/>
+            </a:prstTxWarp>
+            <a:spAutoFit/>
+          </a:bodyPr>
+          <a:lstStyle/>
+          <a:p>
+            <a:pPr marL="0" marR="0" lvl="0" indent="0" algn="l" defTabSz="914400" rtl="0" eaLnBrk="0" fontAlgn="base" latinLnBrk="0" hangingPunct="0">
+              <a:lnSpc>
+                <a:spcPct val="100000"/>
+              </a:lnSpc>
+              <a:spcBef>
+                <a:spcPct val="0"/>
+              </a:spcBef>
+              <a:spcAft>
+                <a:spcPct val="0"/>
+              </a:spcAft>
+              <a:buClrTx/>
+              <a:buSzTx/>
+              <a:buFontTx/>
+              <a:buNone/>
+              <a:tabLst/>
+            </a:pPr>
+            <a:r>
+              <a:rPr kumimoji="0" lang="en-US" altLang="en-US" sz="4800" b="0" i="0" u="none" strike="noStrike" cap="none" normalizeH="0" baseline="-25000" dirty="0">
+                <a:ln>
+                  <a:noFill/>
+                </a:ln>
+                <a:solidFill>
+                  <a:schemeClr val="tx1"/>
+                </a:solidFill>
+                <a:effectLst/>
+                <a:latin typeface="Arial" panose="020B0604020202020204" pitchFamily="34" charset="0"/>
+              </a:rPr>
+              <a:t>In programming, we use abstraction to manage complexity. </a:t>
+            </a:r>
+          </a:p>
+          <a:p>
+            <a:pPr marL="0" marR="0" lvl="0" indent="0" algn="l" defTabSz="914400" rtl="0" eaLnBrk="0" fontAlgn="base" latinLnBrk="0" hangingPunct="0">
+              <a:lnSpc>
+                <a:spcPct val="100000"/>
+              </a:lnSpc>
+              <a:spcBef>
+                <a:spcPct val="0"/>
+              </a:spcBef>
+              <a:spcAft>
+                <a:spcPct val="0"/>
+              </a:spcAft>
+              <a:buClrTx/>
+              <a:buSzTx/>
+              <a:buFontTx/>
+              <a:buNone/>
+              <a:tabLst/>
+            </a:pPr>
+            <a:r>
+              <a:rPr kumimoji="0" lang="en-US" altLang="en-US" sz="4800" b="0" i="0" u="none" strike="noStrike" cap="none" normalizeH="0" baseline="-25000" dirty="0">
+                <a:ln>
+                  <a:noFill/>
+                </a:ln>
+                <a:solidFill>
+                  <a:schemeClr val="tx1"/>
+                </a:solidFill>
+                <a:effectLst/>
+                <a:latin typeface="Arial" panose="020B0604020202020204" pitchFamily="34" charset="0"/>
+              </a:rPr>
+              <a:t>We create classes and objects that expose a simple interface to the user,</a:t>
+            </a:r>
+          </a:p>
+          <a:p>
+            <a:pPr marL="0" marR="0" lvl="0" indent="0" algn="l" defTabSz="914400" rtl="0" eaLnBrk="0" fontAlgn="base" latinLnBrk="0" hangingPunct="0">
+              <a:lnSpc>
+                <a:spcPct val="100000"/>
+              </a:lnSpc>
+              <a:spcBef>
+                <a:spcPct val="0"/>
+              </a:spcBef>
+              <a:spcAft>
+                <a:spcPct val="0"/>
+              </a:spcAft>
+              <a:buClrTx/>
+              <a:buSzTx/>
+              <a:buFontTx/>
+              <a:buNone/>
+              <a:tabLst/>
+            </a:pPr>
+            <a:r>
+              <a:rPr kumimoji="0" lang="en-US" altLang="en-US" sz="4800" b="0" i="0" u="none" strike="noStrike" cap="none" normalizeH="0" baseline="-25000" dirty="0">
+                <a:ln>
+                  <a:noFill/>
+                </a:ln>
+                <a:solidFill>
+                  <a:schemeClr val="tx1"/>
+                </a:solidFill>
+                <a:effectLst/>
+                <a:latin typeface="Arial" panose="020B0604020202020204" pitchFamily="34" charset="0"/>
+              </a:rPr>
+              <a:t> while hiding the complex logic inside.</a:t>
+            </a:r>
+          </a:p>
+          <a:p>
+            <a:pPr marL="0" marR="0" lvl="0" indent="0" algn="l" defTabSz="914400" rtl="0" eaLnBrk="0" fontAlgn="base" latinLnBrk="0" hangingPunct="0">
+              <a:lnSpc>
+                <a:spcPct val="100000"/>
+              </a:lnSpc>
+              <a:spcBef>
+                <a:spcPct val="0"/>
+              </a:spcBef>
+              <a:spcAft>
+                <a:spcPct val="0"/>
+              </a:spcAft>
+              <a:buClrTx/>
+              <a:buSzTx/>
+              <a:buFontTx/>
+              <a:buNone/>
+              <a:tabLst/>
+            </a:pPr>
+            <a:r>
+              <a:rPr kumimoji="0" lang="en-US" altLang="en-US" sz="4800" b="0" i="0" u="none" strike="noStrike" cap="none" normalizeH="0" baseline="-25000" dirty="0">
+                <a:ln>
+                  <a:noFill/>
+                </a:ln>
+                <a:solidFill>
+                  <a:schemeClr val="tx1"/>
+                </a:solidFill>
+                <a:effectLst/>
+                <a:latin typeface="Arial" panose="020B0604020202020204" pitchFamily="34" charset="0"/>
+              </a:rPr>
+              <a:t>Here is a Python example that models the car analogy. </a:t>
+            </a:r>
+          </a:p>
+          <a:p>
+            <a:pPr marL="0" marR="0" lvl="0" indent="0" algn="l" defTabSz="914400" rtl="0" eaLnBrk="0" fontAlgn="base" latinLnBrk="0" hangingPunct="0">
+              <a:lnSpc>
+                <a:spcPct val="100000"/>
+              </a:lnSpc>
+              <a:spcBef>
+                <a:spcPct val="0"/>
+              </a:spcBef>
+              <a:spcAft>
+                <a:spcPct val="0"/>
+              </a:spcAft>
+              <a:buClrTx/>
+              <a:buSzTx/>
+              <a:buFontTx/>
+              <a:buNone/>
+              <a:tabLst/>
+            </a:pPr>
+            <a:r>
+              <a:rPr kumimoji="0" lang="en-US" altLang="en-US" sz="4800" b="0" i="0" u="none" strike="noStrike" cap="none" normalizeH="0" baseline="-25000" dirty="0">
+                <a:ln>
+                  <a:noFill/>
+                </a:ln>
+                <a:solidFill>
+                  <a:schemeClr val="tx1"/>
+                </a:solidFill>
+                <a:effectLst/>
+                <a:latin typeface="Arial" panose="020B0604020202020204" pitchFamily="34" charset="0"/>
+              </a:rPr>
+              <a:t>The </a:t>
+            </a:r>
+            <a:r>
+              <a:rPr kumimoji="0" lang="en-US" altLang="en-US" sz="2400" b="0" i="0" u="none" strike="noStrike" cap="none" normalizeH="0" baseline="-25000" dirty="0">
+                <a:ln>
+                  <a:noFill/>
+                </a:ln>
+                <a:solidFill>
+                  <a:schemeClr val="tx1"/>
+                </a:solidFill>
+                <a:effectLst/>
+                <a:latin typeface="Arial Unicode MS"/>
+              </a:rPr>
+              <a:t>Car</a:t>
+            </a:r>
+            <a:r>
+              <a:rPr kumimoji="0" lang="en-US" altLang="en-US" sz="3200" b="0" i="0" u="none" strike="noStrike" cap="none" normalizeH="0" baseline="-25000" dirty="0">
+                <a:ln>
+                  <a:noFill/>
+                </a:ln>
+                <a:solidFill>
+                  <a:schemeClr val="tx1"/>
+                </a:solidFill>
+                <a:effectLst/>
+              </a:rPr>
+              <a:t> class is an abstraction. The driver (the person using the </a:t>
+            </a:r>
+            <a:r>
+              <a:rPr kumimoji="0" lang="en-US" altLang="en-US" sz="2400" b="0" i="0" u="none" strike="noStrike" cap="none" normalizeH="0" baseline="-25000" dirty="0">
+                <a:ln>
+                  <a:noFill/>
+                </a:ln>
+                <a:solidFill>
+                  <a:schemeClr val="tx1"/>
+                </a:solidFill>
+                <a:effectLst/>
+                <a:latin typeface="Arial Unicode MS"/>
+              </a:rPr>
+              <a:t>Car</a:t>
+            </a:r>
+            <a:r>
+              <a:rPr kumimoji="0" lang="en-US" altLang="en-US" sz="3200" b="0" i="0" u="none" strike="noStrike" cap="none" normalizeH="0" baseline="-25000" dirty="0">
+                <a:ln>
+                  <a:noFill/>
+                </a:ln>
+                <a:solidFill>
+                  <a:schemeClr val="tx1"/>
+                </a:solidFill>
+                <a:effectLst/>
+              </a:rPr>
+              <a:t> object) only needs to know about </a:t>
+            </a:r>
+            <a:r>
+              <a:rPr kumimoji="0" lang="en-US" altLang="en-US" sz="2400" b="0" i="0" u="none" strike="noStrike" cap="none" normalizeH="0" baseline="-25000" dirty="0">
+                <a:ln>
+                  <a:noFill/>
+                </a:ln>
+                <a:solidFill>
+                  <a:schemeClr val="tx1"/>
+                </a:solidFill>
+                <a:effectLst/>
+                <a:latin typeface="Arial Unicode MS"/>
+              </a:rPr>
+              <a:t>start()</a:t>
+            </a:r>
+            <a:r>
+              <a:rPr kumimoji="0" lang="en-US" altLang="en-US" sz="3200" b="0" i="0" u="none" strike="noStrike" cap="none" normalizeH="0" baseline="-25000" dirty="0">
+                <a:ln>
+                  <a:noFill/>
+                </a:ln>
+                <a:solidFill>
+                  <a:schemeClr val="tx1"/>
+                </a:solidFill>
+                <a:effectLst/>
+              </a:rPr>
+              <a:t>, </a:t>
+            </a:r>
+            <a:r>
+              <a:rPr kumimoji="0" lang="en-US" altLang="en-US" sz="2400" b="0" i="0" u="none" strike="noStrike" cap="none" normalizeH="0" baseline="-25000" dirty="0">
+                <a:ln>
+                  <a:noFill/>
+                </a:ln>
+                <a:solidFill>
+                  <a:schemeClr val="tx1"/>
+                </a:solidFill>
+                <a:effectLst/>
+                <a:latin typeface="Arial Unicode MS"/>
+              </a:rPr>
+              <a:t>accelerate()</a:t>
+            </a:r>
+            <a:r>
+              <a:rPr kumimoji="0" lang="en-US" altLang="en-US" sz="3200" b="0" i="0" u="none" strike="noStrike" cap="none" normalizeH="0" baseline="-25000" dirty="0">
+                <a:ln>
+                  <a:noFill/>
+                </a:ln>
+                <a:solidFill>
+                  <a:schemeClr val="tx1"/>
+                </a:solidFill>
+                <a:effectLst/>
+              </a:rPr>
+              <a:t>, and </a:t>
+            </a:r>
+            <a:r>
+              <a:rPr kumimoji="0" lang="en-US" altLang="en-US" sz="2400" b="0" i="0" u="none" strike="noStrike" cap="none" normalizeH="0" baseline="-25000" dirty="0">
+                <a:ln>
+                  <a:noFill/>
+                </a:ln>
+                <a:solidFill>
+                  <a:schemeClr val="tx1"/>
+                </a:solidFill>
+                <a:effectLst/>
+                <a:latin typeface="Arial Unicode MS"/>
+              </a:rPr>
+              <a:t>brake()</a:t>
+            </a:r>
+            <a:r>
+              <a:rPr kumimoji="0" lang="en-US" altLang="en-US" sz="3200" b="0" i="0" u="none" strike="noStrike" cap="none" normalizeH="0" baseline="-25000" dirty="0">
+                <a:ln>
+                  <a:noFill/>
+                </a:ln>
+                <a:solidFill>
+                  <a:schemeClr val="tx1"/>
+                </a:solidFill>
+                <a:effectLst/>
+              </a:rPr>
+              <a:t>. </a:t>
+            </a:r>
+          </a:p>
+          <a:p>
+            <a:pPr marL="0" marR="0" lvl="0" indent="0" algn="l" defTabSz="914400" rtl="0" eaLnBrk="0" fontAlgn="base" latinLnBrk="0" hangingPunct="0">
+              <a:lnSpc>
+                <a:spcPct val="100000"/>
+              </a:lnSpc>
+              <a:spcBef>
+                <a:spcPct val="0"/>
+              </a:spcBef>
+              <a:spcAft>
+                <a:spcPct val="0"/>
+              </a:spcAft>
+              <a:buClrTx/>
+              <a:buSzTx/>
+              <a:buFontTx/>
+              <a:buNone/>
+              <a:tabLst/>
+            </a:pPr>
+            <a:r>
+              <a:rPr kumimoji="0" lang="en-US" altLang="en-US" sz="3200" b="0" i="0" u="none" strike="noStrike" cap="none" normalizeH="0" baseline="-25000" dirty="0">
+                <a:ln>
+                  <a:noFill/>
+                </a:ln>
+                <a:solidFill>
+                  <a:schemeClr val="tx1"/>
+                </a:solidFill>
+                <a:effectLst/>
+              </a:rPr>
+              <a:t>They don't need to know about the </a:t>
+            </a:r>
+            <a:r>
+              <a:rPr kumimoji="0" lang="en-US" altLang="en-US" sz="2400" b="0" i="0" u="none" strike="noStrike" cap="none" normalizeH="0" baseline="-25000" dirty="0">
+                <a:ln>
+                  <a:noFill/>
+                </a:ln>
+                <a:solidFill>
+                  <a:schemeClr val="tx1"/>
+                </a:solidFill>
+                <a:effectLst/>
+                <a:latin typeface="Arial Unicode MS"/>
+              </a:rPr>
+              <a:t>_</a:t>
+            </a:r>
+            <a:r>
+              <a:rPr kumimoji="0" lang="en-US" altLang="en-US" sz="2400" b="0" i="0" u="none" strike="noStrike" cap="none" normalizeH="0" baseline="-25000" dirty="0" err="1">
+                <a:ln>
+                  <a:noFill/>
+                </a:ln>
+                <a:solidFill>
+                  <a:schemeClr val="tx1"/>
+                </a:solidFill>
+                <a:effectLst/>
+                <a:latin typeface="Arial Unicode MS"/>
+              </a:rPr>
+              <a:t>check_fuel</a:t>
+            </a:r>
+            <a:r>
+              <a:rPr kumimoji="0" lang="en-US" altLang="en-US" sz="2400" b="0" i="0" u="none" strike="noStrike" cap="none" normalizeH="0" baseline="-25000" dirty="0">
+                <a:ln>
+                  <a:noFill/>
+                </a:ln>
+                <a:solidFill>
+                  <a:schemeClr val="tx1"/>
+                </a:solidFill>
+                <a:effectLst/>
+                <a:latin typeface="Arial Unicode MS"/>
+              </a:rPr>
+              <a:t>()</a:t>
+            </a:r>
+            <a:r>
+              <a:rPr kumimoji="0" lang="en-US" altLang="en-US" sz="3200" b="0" i="0" u="none" strike="noStrike" cap="none" normalizeH="0" baseline="-25000" dirty="0">
+                <a:ln>
+                  <a:noFill/>
+                </a:ln>
+                <a:solidFill>
+                  <a:schemeClr val="tx1"/>
+                </a:solidFill>
+                <a:effectLst/>
+              </a:rPr>
+              <a:t>, </a:t>
+            </a:r>
+            <a:r>
+              <a:rPr kumimoji="0" lang="en-US" altLang="en-US" sz="2400" b="0" i="0" u="none" strike="noStrike" cap="none" normalizeH="0" baseline="-25000" dirty="0">
+                <a:ln>
+                  <a:noFill/>
+                </a:ln>
+                <a:solidFill>
+                  <a:schemeClr val="tx1"/>
+                </a:solidFill>
+                <a:effectLst/>
+                <a:latin typeface="Arial Unicode MS"/>
+              </a:rPr>
+              <a:t>_</a:t>
+            </a:r>
+            <a:r>
+              <a:rPr kumimoji="0" lang="en-US" altLang="en-US" sz="2400" b="0" i="0" u="none" strike="noStrike" cap="none" normalizeH="0" baseline="-25000" dirty="0" err="1">
+                <a:ln>
+                  <a:noFill/>
+                </a:ln>
+                <a:solidFill>
+                  <a:schemeClr val="tx1"/>
+                </a:solidFill>
+                <a:effectLst/>
+                <a:latin typeface="Arial Unicode MS"/>
+              </a:rPr>
+              <a:t>ignite_spark_plug</a:t>
+            </a:r>
+            <a:r>
+              <a:rPr kumimoji="0" lang="en-US" altLang="en-US" sz="2400" b="0" i="0" u="none" strike="noStrike" cap="none" normalizeH="0" baseline="-25000" dirty="0">
+                <a:ln>
+                  <a:noFill/>
+                </a:ln>
+                <a:solidFill>
+                  <a:schemeClr val="tx1"/>
+                </a:solidFill>
+                <a:effectLst/>
+                <a:latin typeface="Arial Unicode MS"/>
+              </a:rPr>
+              <a:t>()</a:t>
+            </a:r>
+            <a:r>
+              <a:rPr kumimoji="0" lang="en-US" altLang="en-US" sz="3200" b="0" i="0" u="none" strike="noStrike" cap="none" normalizeH="0" baseline="-25000" dirty="0">
+                <a:ln>
+                  <a:noFill/>
+                </a:ln>
+                <a:solidFill>
+                  <a:schemeClr val="tx1"/>
+                </a:solidFill>
+                <a:effectLst/>
+              </a:rPr>
+              <a:t>, or </a:t>
+            </a:r>
+            <a:r>
+              <a:rPr kumimoji="0" lang="en-US" altLang="en-US" sz="2400" b="0" i="0" u="none" strike="noStrike" cap="none" normalizeH="0" baseline="-25000" dirty="0">
+                <a:ln>
+                  <a:noFill/>
+                </a:ln>
+                <a:solidFill>
+                  <a:schemeClr val="tx1"/>
+                </a:solidFill>
+                <a:effectLst/>
+                <a:latin typeface="Arial Unicode MS"/>
+              </a:rPr>
+              <a:t>_</a:t>
+            </a:r>
+            <a:r>
+              <a:rPr kumimoji="0" lang="en-US" altLang="en-US" sz="2400" b="0" i="0" u="none" strike="noStrike" cap="none" normalizeH="0" baseline="-25000" dirty="0" err="1">
+                <a:ln>
+                  <a:noFill/>
+                </a:ln>
+                <a:solidFill>
+                  <a:schemeClr val="tx1"/>
+                </a:solidFill>
+                <a:effectLst/>
+                <a:latin typeface="Arial Unicode MS"/>
+              </a:rPr>
+              <a:t>inject_fuel</a:t>
+            </a:r>
+            <a:r>
+              <a:rPr kumimoji="0" lang="en-US" altLang="en-US" sz="2400" b="0" i="0" u="none" strike="noStrike" cap="none" normalizeH="0" baseline="-25000" dirty="0">
+                <a:ln>
+                  <a:noFill/>
+                </a:ln>
+                <a:solidFill>
+                  <a:schemeClr val="tx1"/>
+                </a:solidFill>
+                <a:effectLst/>
+                <a:latin typeface="Arial Unicode MS"/>
+              </a:rPr>
+              <a:t>()</a:t>
+            </a:r>
+            <a:r>
+              <a:rPr kumimoji="0" lang="en-US" altLang="en-US" sz="3200" b="0" i="0" u="none" strike="noStrike" cap="none" normalizeH="0" baseline="-25000" dirty="0">
+                <a:ln>
+                  <a:noFill/>
+                </a:ln>
+                <a:solidFill>
+                  <a:schemeClr val="tx1"/>
+                </a:solidFill>
+                <a:effectLst/>
+              </a:rPr>
+              <a:t> methods, which are hidden implementation details.</a:t>
+            </a:r>
+            <a:endParaRPr kumimoji="0" lang="en-US" altLang="en-US" sz="4800" b="0" i="0" u="none" strike="noStrike" cap="none" normalizeH="0" baseline="-25000" dirty="0">
+              <a:ln>
+                <a:noFill/>
+              </a:ln>
+              <a:solidFill>
+                <a:schemeClr val="tx1"/>
+              </a:solidFill>
+              <a:effectLst/>
+              <a:latin typeface="Arial" panose="020B0604020202020204" pitchFamily="34" charset="0"/>
+            </a:endParaRPr>
+          </a:p>
+        </p:txBody>
+      </p:sp>
+    </p:spTree>
+    <p:extLst>
+      <p:ext uri="{BB962C8B-B14F-4D97-AF65-F5344CB8AC3E}">
+        <p14:creationId xmlns:p14="http://schemas.microsoft.com/office/powerpoint/2010/main" val="2466819509"/>
+      </p:ext>
+    </p:extLst>
+  </p:cSld>
+  <p:clrMapOvr>
+    <a:masterClrMapping/>
+  </p:clrMapOvr>
+</p:sld>
+</file>
+
+<file path=ppt/slides/slide19.xml><?xml version="1.0" encoding="utf-8"?>
+<p:sld xmlns:a="http://schemas.openxmlformats.org/drawingml/2006/main" xmlns:r="http://schemas.openxmlformats.org/officeDocument/2006/relationships" xmlns:p="http://schemas.openxmlformats.org/presentationml/2006/main">
+  <p:cSld>
+    <p:spTree>
+      <p:nvGrpSpPr>
+        <p:cNvPr id="1" name=""/>
+        <p:cNvGrpSpPr/>
+        <p:nvPr/>
+      </p:nvGrpSpPr>
+      <p:grpSpPr>
+        <a:xfrm>
+          <a:off x="0" y="0"/>
+          <a:ext cx="0" cy="0"/>
+          <a:chOff x="0" y="0"/>
+          <a:chExt cx="0" cy="0"/>
+        </a:xfrm>
+      </p:grpSpPr>
+      <p:sp>
+        <p:nvSpPr>
+          <p:cNvPr id="2" name="Title 1">
+            <a:extLst>
+              <a:ext uri="{FF2B5EF4-FFF2-40B4-BE49-F238E27FC236}">
+                <a16:creationId xmlns:a16="http://schemas.microsoft.com/office/drawing/2014/main" id="{061951F6-96BF-4260-A76C-F16B4921C717}"/>
+              </a:ext>
+            </a:extLst>
+          </p:cNvPr>
+          <p:cNvSpPr>
+            <a:spLocks noGrp="1"/>
+          </p:cNvSpPr>
+          <p:nvPr>
+            <p:ph type="title"/>
+          </p:nvPr>
+        </p:nvSpPr>
+        <p:spPr>
+          <a:xfrm>
+            <a:off x="646111" y="452718"/>
+            <a:ext cx="9323389" cy="664882"/>
+          </a:xfrm>
+        </p:spPr>
+        <p:txBody>
+          <a:bodyPr/>
+          <a:lstStyle/>
+          <a:p>
+            <a:r>
+              <a:rPr kumimoji="0" lang="en-US" altLang="en-US" sz="4000" b="1" i="0" u="none" strike="noStrike" cap="none" normalizeH="0" baseline="0" dirty="0">
+                <a:ln>
+                  <a:noFill/>
+                </a:ln>
+                <a:solidFill>
+                  <a:schemeClr val="tx1"/>
+                </a:solidFill>
+                <a:effectLst/>
+                <a:latin typeface="Arial" panose="020B0604020202020204" pitchFamily="34" charset="0"/>
+              </a:rPr>
+              <a:t>Benefits of Abstraction in this Code:</a:t>
+            </a:r>
+            <a:br>
+              <a:rPr kumimoji="0" lang="en-US" altLang="en-US" sz="4000" b="1" i="0" u="none" strike="noStrike" cap="none" normalizeH="0" baseline="0" dirty="0">
+                <a:ln>
+                  <a:noFill/>
+                </a:ln>
+                <a:solidFill>
+                  <a:schemeClr val="tx1"/>
+                </a:solidFill>
+                <a:effectLst/>
+                <a:latin typeface="Arial" panose="020B0604020202020204" pitchFamily="34" charset="0"/>
+              </a:rPr>
+            </a:br>
+            <a:endParaRPr lang="en-US" sz="4000" dirty="0"/>
+          </a:p>
+        </p:txBody>
+      </p:sp>
+      <p:sp>
+        <p:nvSpPr>
+          <p:cNvPr id="4" name="Rectangle 1">
+            <a:extLst>
+              <a:ext uri="{FF2B5EF4-FFF2-40B4-BE49-F238E27FC236}">
+                <a16:creationId xmlns:a16="http://schemas.microsoft.com/office/drawing/2014/main" id="{5A399D68-32F7-4B22-A866-F2D45DFF4E1A}"/>
+              </a:ext>
+            </a:extLst>
+          </p:cNvPr>
+          <p:cNvSpPr>
+            <a:spLocks noGrp="1" noChangeArrowheads="1"/>
+          </p:cNvSpPr>
+          <p:nvPr>
+            <p:ph idx="1"/>
+          </p:nvPr>
+        </p:nvSpPr>
+        <p:spPr bwMode="auto">
+          <a:xfrm>
+            <a:off x="203200" y="1897986"/>
+            <a:ext cx="10985500" cy="4462760"/>
+          </a:xfrm>
+          <a:prstGeom prst="rect">
+            <a:avLst/>
+          </a:prstGeom>
+          <a:noFill/>
+          <a:ln>
+            <a:noFill/>
+          </a:ln>
+          <a:effectLst/>
+          <a:extLst>
+            <a:ext uri="{909E8E84-426E-40DD-AFC4-6F175D3DCCD1}">
+              <a14:hiddenFill xmlns:a14="http://schemas.microsoft.com/office/drawing/2010/main">
+                <a:solidFill>
+                  <a:schemeClr val="accent1"/>
+                </a:solidFill>
+              </a14:hiddenFill>
+            </a:ext>
+            <a:ext uri="{91240B29-F687-4F45-9708-019B960494DF}">
+              <a14:hiddenLine xmlns:a14="http://schemas.microsoft.com/office/drawing/2010/main" w="9525">
+                <a:solidFill>
+                  <a:schemeClr val="tx1"/>
+                </a:solidFill>
+                <a:miter lim="800000"/>
+                <a:headEnd/>
+                <a:tailEnd/>
+              </a14:hiddenLine>
+            </a:ext>
+            <a:ext uri="{AF507438-7753-43E0-B8FC-AC1667EBCBE1}">
+              <a14:hiddenEffects xmlns:a14="http://schemas.microsoft.com/office/drawing/2010/main">
+                <a:effectLst>
+                  <a:outerShdw dist="35921" dir="2700000" algn="ctr" rotWithShape="0">
+                    <a:schemeClr val="bg2"/>
+                  </a:outerShdw>
+                </a:effectLst>
+              </a14:hiddenEffects>
+            </a:ext>
+          </a:extLst>
+        </p:spPr>
+        <p:txBody>
+          <a:bodyPr vert="horz" wrap="square" lIns="91440" tIns="45720" rIns="91440" bIns="45720" numCol="1" anchor="ctr" anchorCtr="0" compatLnSpc="1">
+            <a:prstTxWarp prst="textNoShape">
+              <a:avLst/>
+            </a:prstTxWarp>
+            <a:spAutoFit/>
+          </a:bodyPr>
+          <a:lstStyle/>
+          <a:p>
+            <a:pPr marL="0" marR="0" lvl="0" indent="0" algn="l" defTabSz="914400" rtl="0" eaLnBrk="0" fontAlgn="base" latinLnBrk="0" hangingPunct="0">
+              <a:lnSpc>
+                <a:spcPct val="100000"/>
+              </a:lnSpc>
+              <a:spcBef>
+                <a:spcPct val="0"/>
+              </a:spcBef>
+              <a:spcAft>
+                <a:spcPct val="0"/>
+              </a:spcAft>
+              <a:buClrTx/>
+              <a:buSzTx/>
+              <a:buFontTx/>
+              <a:buChar char="•"/>
+              <a:tabLst/>
+            </a:pPr>
+            <a:r>
+              <a:rPr kumimoji="0" lang="en-US" altLang="en-US" sz="2800" b="1" i="0" u="none" strike="noStrike" cap="none" normalizeH="0" baseline="0" dirty="0">
+                <a:ln>
+                  <a:noFill/>
+                </a:ln>
+                <a:solidFill>
+                  <a:schemeClr val="tx1"/>
+                </a:solidFill>
+                <a:effectLst/>
+                <a:latin typeface="Arial" panose="020B0604020202020204" pitchFamily="34" charset="0"/>
+              </a:rPr>
+              <a:t>Simplicity:</a:t>
+            </a:r>
+            <a:r>
+              <a:rPr kumimoji="0" lang="en-US" altLang="en-US" sz="2800" b="0" i="0" u="none" strike="noStrike" cap="none" normalizeH="0" baseline="0" dirty="0">
+                <a:ln>
+                  <a:noFill/>
+                </a:ln>
+                <a:solidFill>
+                  <a:schemeClr val="tx1"/>
+                </a:solidFill>
+                <a:effectLst/>
+                <a:latin typeface="Arial" panose="020B0604020202020204" pitchFamily="34" charset="0"/>
+              </a:rPr>
+              <a:t> The person using the </a:t>
+            </a:r>
+            <a:r>
+              <a:rPr kumimoji="0" lang="en-US" altLang="en-US" sz="1200" b="0" i="0" u="none" strike="noStrike" cap="none" normalizeH="0" baseline="0" dirty="0">
+                <a:ln>
+                  <a:noFill/>
+                </a:ln>
+                <a:solidFill>
+                  <a:schemeClr val="tx1"/>
+                </a:solidFill>
+                <a:effectLst/>
+                <a:latin typeface="Arial Unicode MS"/>
+              </a:rPr>
+              <a:t>Car</a:t>
+            </a:r>
+            <a:r>
+              <a:rPr kumimoji="0" lang="en-US" altLang="en-US" sz="1600" b="0" i="0" u="none" strike="noStrike" cap="none" normalizeH="0" baseline="0" dirty="0">
+                <a:ln>
+                  <a:noFill/>
+                </a:ln>
+                <a:solidFill>
+                  <a:schemeClr val="tx1"/>
+                </a:solidFill>
+                <a:effectLst/>
+              </a:rPr>
+              <a:t> object doesn't need to understand the complex sequence of events required to start an engine. </a:t>
+            </a:r>
+          </a:p>
+          <a:p>
+            <a:pPr marL="0" marR="0" lvl="0" indent="0" algn="l" defTabSz="914400" rtl="0" eaLnBrk="0" fontAlgn="base" latinLnBrk="0" hangingPunct="0">
+              <a:lnSpc>
+                <a:spcPct val="100000"/>
+              </a:lnSpc>
+              <a:spcBef>
+                <a:spcPct val="0"/>
+              </a:spcBef>
+              <a:spcAft>
+                <a:spcPct val="0"/>
+              </a:spcAft>
+              <a:buClrTx/>
+              <a:buSzTx/>
+              <a:buNone/>
+              <a:tabLst/>
+            </a:pPr>
+            <a:r>
+              <a:rPr kumimoji="0" lang="en-US" altLang="en-US" sz="1600" b="0" i="0" u="none" strike="noStrike" cap="none" normalizeH="0" baseline="0" dirty="0">
+                <a:ln>
+                  <a:noFill/>
+                </a:ln>
+                <a:solidFill>
+                  <a:schemeClr val="tx1"/>
+                </a:solidFill>
+                <a:effectLst/>
+              </a:rPr>
+              <a:t>They just call </a:t>
+            </a:r>
+            <a:r>
+              <a:rPr kumimoji="0" lang="en-US" altLang="en-US" sz="1200" b="0" i="0" u="none" strike="noStrike" cap="none" normalizeH="0" baseline="0" dirty="0" err="1">
+                <a:ln>
+                  <a:noFill/>
+                </a:ln>
+                <a:solidFill>
+                  <a:schemeClr val="tx1"/>
+                </a:solidFill>
+                <a:effectLst/>
+                <a:latin typeface="Arial Unicode MS"/>
+              </a:rPr>
+              <a:t>my_car.start</a:t>
+            </a:r>
+            <a:r>
+              <a:rPr kumimoji="0" lang="en-US" altLang="en-US" sz="1200" b="0" i="0" u="none" strike="noStrike" cap="none" normalizeH="0" baseline="0" dirty="0">
+                <a:ln>
+                  <a:noFill/>
+                </a:ln>
+                <a:solidFill>
+                  <a:schemeClr val="tx1"/>
+                </a:solidFill>
+                <a:effectLst/>
+                <a:latin typeface="Arial Unicode MS"/>
+              </a:rPr>
+              <a:t>()</a:t>
+            </a:r>
+            <a:r>
+              <a:rPr kumimoji="0" lang="en-US" altLang="en-US" sz="1600" b="0" i="0" u="none" strike="noStrike" cap="none" normalizeH="0" baseline="0" dirty="0">
+                <a:ln>
+                  <a:noFill/>
+                </a:ln>
+                <a:solidFill>
+                  <a:schemeClr val="tx1"/>
+                </a:solidFill>
+                <a:effectLst/>
+              </a:rPr>
+              <a:t>.</a:t>
+            </a:r>
+            <a:r>
+              <a:rPr kumimoji="0" lang="en-US" altLang="en-US" sz="2800" b="0" i="0" u="none" strike="noStrike" cap="none" normalizeH="0" baseline="0" dirty="0">
+                <a:ln>
+                  <a:noFill/>
+                </a:ln>
+                <a:solidFill>
+                  <a:schemeClr val="tx1"/>
+                </a:solidFill>
+                <a:effectLst/>
+                <a:latin typeface="Arial" panose="020B0604020202020204" pitchFamily="34" charset="0"/>
+              </a:rPr>
+              <a:t> </a:t>
+            </a:r>
+          </a:p>
+          <a:p>
+            <a:pPr marL="0" marR="0" lvl="0" indent="0" algn="l" defTabSz="914400" rtl="0" eaLnBrk="0" fontAlgn="base" latinLnBrk="0" hangingPunct="0">
+              <a:lnSpc>
+                <a:spcPct val="100000"/>
+              </a:lnSpc>
+              <a:spcBef>
+                <a:spcPct val="0"/>
+              </a:spcBef>
+              <a:spcAft>
+                <a:spcPct val="0"/>
+              </a:spcAft>
+              <a:buClrTx/>
+              <a:buSzTx/>
+              <a:buFontTx/>
+              <a:buChar char="•"/>
+              <a:tabLst/>
+            </a:pPr>
+            <a:r>
+              <a:rPr kumimoji="0" lang="en-US" altLang="en-US" sz="2800" b="1" i="0" u="none" strike="noStrike" cap="none" normalizeH="0" baseline="0" dirty="0">
+                <a:ln>
+                  <a:noFill/>
+                </a:ln>
+                <a:solidFill>
+                  <a:schemeClr val="tx1"/>
+                </a:solidFill>
+                <a:effectLst/>
+                <a:latin typeface="Arial" panose="020B0604020202020204" pitchFamily="34" charset="0"/>
+              </a:rPr>
+              <a:t>Maintainability:</a:t>
+            </a:r>
+            <a:r>
+              <a:rPr kumimoji="0" lang="en-US" altLang="en-US" sz="2800" b="0" i="0" u="none" strike="noStrike" cap="none" normalizeH="0" baseline="0" dirty="0">
+                <a:ln>
+                  <a:noFill/>
+                </a:ln>
+                <a:solidFill>
+                  <a:schemeClr val="tx1"/>
+                </a:solidFill>
+                <a:effectLst/>
+                <a:latin typeface="Arial" panose="020B0604020202020204" pitchFamily="34" charset="0"/>
+              </a:rPr>
+              <a:t> If we want to change how the engine works</a:t>
+            </a:r>
+          </a:p>
+          <a:p>
+            <a:pPr marL="0" marR="0" lvl="0" indent="0" algn="l" defTabSz="914400" rtl="0" eaLnBrk="0" fontAlgn="base" latinLnBrk="0" hangingPunct="0">
+              <a:lnSpc>
+                <a:spcPct val="100000"/>
+              </a:lnSpc>
+              <a:spcBef>
+                <a:spcPct val="0"/>
+              </a:spcBef>
+              <a:spcAft>
+                <a:spcPct val="0"/>
+              </a:spcAft>
+              <a:buClrTx/>
+              <a:buSzTx/>
+              <a:buNone/>
+              <a:tabLst/>
+            </a:pPr>
+            <a:r>
+              <a:rPr kumimoji="0" lang="en-US" altLang="en-US" sz="2800" b="0" i="0" u="none" strike="noStrike" cap="none" normalizeH="0" baseline="0" dirty="0">
+                <a:ln>
+                  <a:noFill/>
+                </a:ln>
+                <a:solidFill>
+                  <a:schemeClr val="tx1"/>
+                </a:solidFill>
+                <a:effectLst/>
+                <a:latin typeface="Arial" panose="020B0604020202020204" pitchFamily="34" charset="0"/>
+              </a:rPr>
+              <a:t>(e.g., make it more fuel-efficient by changing the </a:t>
+            </a:r>
+            <a:r>
+              <a:rPr kumimoji="0" lang="en-US" altLang="en-US" sz="1200" b="0" i="0" u="none" strike="noStrike" cap="none" normalizeH="0" baseline="0" dirty="0">
+                <a:ln>
+                  <a:noFill/>
+                </a:ln>
+                <a:solidFill>
+                  <a:schemeClr val="tx1"/>
+                </a:solidFill>
+                <a:effectLst/>
+                <a:latin typeface="Arial Unicode MS"/>
+              </a:rPr>
+              <a:t>_</a:t>
+            </a:r>
+            <a:r>
+              <a:rPr kumimoji="0" lang="en-US" altLang="en-US" sz="1200" b="0" i="0" u="none" strike="noStrike" cap="none" normalizeH="0" baseline="0" dirty="0" err="1">
+                <a:ln>
+                  <a:noFill/>
+                </a:ln>
+                <a:solidFill>
+                  <a:schemeClr val="tx1"/>
+                </a:solidFill>
+                <a:effectLst/>
+                <a:latin typeface="Arial Unicode MS"/>
+              </a:rPr>
+              <a:t>inject_fuel</a:t>
+            </a:r>
+            <a:r>
+              <a:rPr kumimoji="0" lang="en-US" altLang="en-US" sz="1600" b="0" i="0" u="none" strike="noStrike" cap="none" normalizeH="0" baseline="0" dirty="0">
+                <a:ln>
+                  <a:noFill/>
+                </a:ln>
+                <a:solidFill>
+                  <a:schemeClr val="tx1"/>
+                </a:solidFill>
+                <a:effectLst/>
+              </a:rPr>
+              <a:t> logic), </a:t>
+            </a:r>
+          </a:p>
+          <a:p>
+            <a:pPr marL="0" marR="0" lvl="0" indent="0" algn="l" defTabSz="914400" rtl="0" eaLnBrk="0" fontAlgn="base" latinLnBrk="0" hangingPunct="0">
+              <a:lnSpc>
+                <a:spcPct val="100000"/>
+              </a:lnSpc>
+              <a:spcBef>
+                <a:spcPct val="0"/>
+              </a:spcBef>
+              <a:spcAft>
+                <a:spcPct val="0"/>
+              </a:spcAft>
+              <a:buClrTx/>
+              <a:buSzTx/>
+              <a:buNone/>
+              <a:tabLst/>
+            </a:pPr>
+            <a:r>
+              <a:rPr kumimoji="0" lang="en-US" altLang="en-US" sz="1600" b="0" i="0" u="none" strike="noStrike" cap="none" normalizeH="0" baseline="0" dirty="0">
+                <a:ln>
+                  <a:noFill/>
+                </a:ln>
+                <a:solidFill>
+                  <a:schemeClr val="tx1"/>
+                </a:solidFill>
+                <a:effectLst/>
+              </a:rPr>
+              <a:t>we can do so without changing the way the driver interacts with the car. The public methods (</a:t>
+            </a:r>
+            <a:r>
+              <a:rPr kumimoji="0" lang="en-US" altLang="en-US" sz="1200" b="0" i="0" u="none" strike="noStrike" cap="none" normalizeH="0" baseline="0" dirty="0">
+                <a:ln>
+                  <a:noFill/>
+                </a:ln>
+                <a:solidFill>
+                  <a:schemeClr val="tx1"/>
+                </a:solidFill>
+                <a:effectLst/>
+                <a:latin typeface="Arial Unicode MS"/>
+              </a:rPr>
+              <a:t>start</a:t>
+            </a:r>
+            <a:r>
+              <a:rPr kumimoji="0" lang="en-US" altLang="en-US" sz="1600" b="0" i="0" u="none" strike="noStrike" cap="none" normalizeH="0" baseline="0" dirty="0">
+                <a:ln>
+                  <a:noFill/>
+                </a:ln>
+                <a:solidFill>
+                  <a:schemeClr val="tx1"/>
+                </a:solidFill>
+                <a:effectLst/>
+              </a:rPr>
+              <a:t>, </a:t>
+            </a:r>
+            <a:r>
+              <a:rPr kumimoji="0" lang="en-US" altLang="en-US" sz="1200" b="0" i="0" u="none" strike="noStrike" cap="none" normalizeH="0" baseline="0" dirty="0">
+                <a:ln>
+                  <a:noFill/>
+                </a:ln>
+                <a:solidFill>
+                  <a:schemeClr val="tx1"/>
+                </a:solidFill>
+                <a:effectLst/>
+                <a:latin typeface="Arial Unicode MS"/>
+              </a:rPr>
+              <a:t>accelerate</a:t>
+            </a:r>
+            <a:r>
+              <a:rPr kumimoji="0" lang="en-US" altLang="en-US" sz="1600" b="0" i="0" u="none" strike="noStrike" cap="none" normalizeH="0" baseline="0" dirty="0">
+                <a:ln>
+                  <a:noFill/>
+                </a:ln>
+                <a:solidFill>
+                  <a:schemeClr val="tx1"/>
+                </a:solidFill>
+                <a:effectLst/>
+              </a:rPr>
+              <a:t>) remain the same.</a:t>
+            </a:r>
+            <a:r>
+              <a:rPr kumimoji="0" lang="en-US" altLang="en-US" sz="2800" b="0" i="0" u="none" strike="noStrike" cap="none" normalizeH="0" baseline="0" dirty="0">
+                <a:ln>
+                  <a:noFill/>
+                </a:ln>
+                <a:solidFill>
+                  <a:schemeClr val="tx1"/>
+                </a:solidFill>
+                <a:effectLst/>
+                <a:latin typeface="Arial" panose="020B0604020202020204" pitchFamily="34" charset="0"/>
+              </a:rPr>
+              <a:t> </a:t>
+            </a:r>
+          </a:p>
+          <a:p>
+            <a:pPr marL="0" marR="0" lvl="0" indent="0" algn="l" defTabSz="914400" rtl="0" eaLnBrk="0" fontAlgn="base" latinLnBrk="0" hangingPunct="0">
+              <a:lnSpc>
+                <a:spcPct val="100000"/>
+              </a:lnSpc>
+              <a:spcBef>
+                <a:spcPct val="0"/>
+              </a:spcBef>
+              <a:spcAft>
+                <a:spcPct val="0"/>
+              </a:spcAft>
+              <a:buClrTx/>
+              <a:buSzTx/>
+              <a:buFontTx/>
+              <a:buChar char="•"/>
+              <a:tabLst/>
+            </a:pPr>
+            <a:r>
+              <a:rPr kumimoji="0" lang="en-US" altLang="en-US" sz="2800" b="1" i="0" u="none" strike="noStrike" cap="none" normalizeH="0" baseline="0" dirty="0">
+                <a:ln>
+                  <a:noFill/>
+                </a:ln>
+                <a:solidFill>
+                  <a:schemeClr val="tx1"/>
+                </a:solidFill>
+                <a:effectLst/>
+                <a:latin typeface="Arial" panose="020B0604020202020204" pitchFamily="34" charset="0"/>
+              </a:rPr>
+              <a:t>Reduces Complexity:</a:t>
+            </a:r>
+            <a:r>
+              <a:rPr kumimoji="0" lang="en-US" altLang="en-US" sz="2800" b="0" i="0" u="none" strike="noStrike" cap="none" normalizeH="0" baseline="0" dirty="0">
+                <a:ln>
+                  <a:noFill/>
+                </a:ln>
+                <a:solidFill>
+                  <a:schemeClr val="tx1"/>
+                </a:solidFill>
+                <a:effectLst/>
+                <a:latin typeface="Arial" panose="020B0604020202020204" pitchFamily="34" charset="0"/>
+              </a:rPr>
+              <a:t> It hides the unnecessary details from the user, </a:t>
+            </a:r>
+          </a:p>
+          <a:p>
+            <a:pPr marL="0" marR="0" lvl="0" indent="0" algn="l" defTabSz="914400" rtl="0" eaLnBrk="0" fontAlgn="base" latinLnBrk="0" hangingPunct="0">
+              <a:lnSpc>
+                <a:spcPct val="100000"/>
+              </a:lnSpc>
+              <a:spcBef>
+                <a:spcPct val="0"/>
+              </a:spcBef>
+              <a:spcAft>
+                <a:spcPct val="0"/>
+              </a:spcAft>
+              <a:buClrTx/>
+              <a:buSzTx/>
+              <a:buFontTx/>
+              <a:buChar char="•"/>
+              <a:tabLst/>
+            </a:pPr>
+            <a:r>
+              <a:rPr kumimoji="0" lang="en-US" altLang="en-US" sz="2800" b="0" i="0" u="none" strike="noStrike" cap="none" normalizeH="0" baseline="0" dirty="0">
+                <a:ln>
+                  <a:noFill/>
+                </a:ln>
+                <a:solidFill>
+                  <a:schemeClr val="tx1"/>
+                </a:solidFill>
+                <a:effectLst/>
+                <a:latin typeface="Arial" panose="020B0604020202020204" pitchFamily="34" charset="0"/>
+              </a:rPr>
+              <a:t>allowing them to focus on their goal (driving the car). </a:t>
+            </a:r>
+          </a:p>
+          <a:p>
+            <a:pPr marL="0" marR="0" lvl="0" indent="0" algn="l" defTabSz="914400" rtl="0" eaLnBrk="0" fontAlgn="base" latinLnBrk="0" hangingPunct="0">
+              <a:lnSpc>
+                <a:spcPct val="100000"/>
+              </a:lnSpc>
+              <a:spcBef>
+                <a:spcPct val="0"/>
+              </a:spcBef>
+              <a:spcAft>
+                <a:spcPct val="0"/>
+              </a:spcAft>
+              <a:buClrTx/>
+              <a:buSzTx/>
+              <a:buFontTx/>
+              <a:buNone/>
+              <a:tabLst/>
+            </a:pPr>
+            <a:endParaRPr kumimoji="0" lang="en-US" altLang="en-US" sz="2800" b="0" i="0" u="none" strike="noStrike" cap="none" normalizeH="0" baseline="0" dirty="0">
+              <a:ln>
+                <a:noFill/>
+              </a:ln>
+              <a:solidFill>
+                <a:schemeClr val="tx1"/>
+              </a:solidFill>
+              <a:effectLst/>
+              <a:latin typeface="Arial" panose="020B0604020202020204" pitchFamily="34" charset="0"/>
+            </a:endParaRPr>
+          </a:p>
+        </p:txBody>
+      </p:sp>
+    </p:spTree>
+    <p:extLst>
+      <p:ext uri="{BB962C8B-B14F-4D97-AF65-F5344CB8AC3E}">
+        <p14:creationId xmlns:p14="http://schemas.microsoft.com/office/powerpoint/2010/main" val="4201578567"/>
+      </p:ext>
+    </p:extLst>
+  </p:cSld>
+  <p:clrMapOvr>
+    <a:masterClrMapping/>
+  </p:clrMapOvr>
+</p:sld>
+</file>
+
 <file path=ppt/slides/slide2.xml><?xml version="1.0" encoding="utf-8"?>
 <p:sld xmlns:a="http://schemas.openxmlformats.org/drawingml/2006/main" xmlns:r="http://schemas.openxmlformats.org/officeDocument/2006/relationships" xmlns:p="http://schemas.openxmlformats.org/presentationml/2006/main">
   <p:cSld>
@@ -7452,6 +8941,129 @@
     <p:extLst>
       <p:ext uri="{BB962C8B-B14F-4D97-AF65-F5344CB8AC3E}">
         <p14:creationId xmlns:p14="http://schemas.microsoft.com/office/powerpoint/2010/main" val="2678427387"/>
+      </p:ext>
+    </p:extLst>
+  </p:cSld>
+  <p:clrMapOvr>
+    <a:masterClrMapping/>
+  </p:clrMapOvr>
+</p:sld>
+</file>
+
+<file path=ppt/slides/slide20.xml><?xml version="1.0" encoding="utf-8"?>
+<p:sld xmlns:a="http://schemas.openxmlformats.org/drawingml/2006/main" xmlns:r="http://schemas.openxmlformats.org/officeDocument/2006/relationships" xmlns:p="http://schemas.openxmlformats.org/presentationml/2006/main">
+  <p:cSld>
+    <p:spTree>
+      <p:nvGrpSpPr>
+        <p:cNvPr id="1" name=""/>
+        <p:cNvGrpSpPr/>
+        <p:nvPr/>
+      </p:nvGrpSpPr>
+      <p:grpSpPr>
+        <a:xfrm>
+          <a:off x="0" y="0"/>
+          <a:ext cx="0" cy="0"/>
+          <a:chOff x="0" y="0"/>
+          <a:chExt cx="0" cy="0"/>
+        </a:xfrm>
+      </p:grpSpPr>
+      <p:sp>
+        <p:nvSpPr>
+          <p:cNvPr id="2" name="Title 1">
+            <a:extLst>
+              <a:ext uri="{FF2B5EF4-FFF2-40B4-BE49-F238E27FC236}">
+                <a16:creationId xmlns:a16="http://schemas.microsoft.com/office/drawing/2014/main" id="{35B9A7C8-0950-4B24-BE91-0136DC614DE0}"/>
+              </a:ext>
+            </a:extLst>
+          </p:cNvPr>
+          <p:cNvSpPr>
+            <a:spLocks noGrp="1"/>
+          </p:cNvSpPr>
+          <p:nvPr>
+            <p:ph type="title"/>
+          </p:nvPr>
+        </p:nvSpPr>
+        <p:spPr>
+          <a:xfrm>
+            <a:off x="646111" y="452718"/>
+            <a:ext cx="9056689" cy="766482"/>
+          </a:xfrm>
+        </p:spPr>
+        <p:txBody>
+          <a:bodyPr/>
+          <a:lstStyle/>
+          <a:p>
+            <a:r>
+              <a:rPr lang="en-US" b="1" dirty="0"/>
+              <a:t>Algorithm Design</a:t>
+            </a:r>
+            <a:endParaRPr lang="en-US" dirty="0"/>
+          </a:p>
+        </p:txBody>
+      </p:sp>
+      <p:sp>
+        <p:nvSpPr>
+          <p:cNvPr id="3" name="Content Placeholder 2">
+            <a:extLst>
+              <a:ext uri="{FF2B5EF4-FFF2-40B4-BE49-F238E27FC236}">
+                <a16:creationId xmlns:a16="http://schemas.microsoft.com/office/drawing/2014/main" id="{539E00E4-71EE-4215-809C-DC87AAF74B51}"/>
+              </a:ext>
+            </a:extLst>
+          </p:cNvPr>
+          <p:cNvSpPr>
+            <a:spLocks noGrp="1"/>
+          </p:cNvSpPr>
+          <p:nvPr>
+            <p:ph idx="1"/>
+          </p:nvPr>
+        </p:nvSpPr>
+        <p:spPr>
+          <a:xfrm>
+            <a:off x="0" y="1219200"/>
+            <a:ext cx="11925300" cy="5638800"/>
+          </a:xfrm>
+        </p:spPr>
+        <p:txBody>
+          <a:bodyPr>
+            <a:normAutofit/>
+          </a:bodyPr>
+          <a:lstStyle/>
+          <a:p>
+            <a:pPr marL="0" indent="0">
+              <a:buNone/>
+            </a:pPr>
+            <a:r>
+              <a:rPr lang="en-US" sz="2800" dirty="0"/>
+              <a:t>Algorithm design is the process of creating a step-by-step set of instructions for solving a problem. This is the final step in algorithmic thinking, and it's where you'll bring together all of the skills you've learned in this section.</a:t>
+            </a:r>
+          </a:p>
+          <a:p>
+            <a:pPr marL="0" indent="0">
+              <a:buNone/>
+            </a:pPr>
+            <a:r>
+              <a:rPr lang="en-US" sz="2800" dirty="0"/>
+              <a:t>When you're designing an algorithm, it's important to be clear, concise, and unambiguous. You should also consider the efficiency of your algorithm and how it will perform on different types of data.</a:t>
+            </a:r>
+          </a:p>
+          <a:p>
+            <a:pPr marL="0" indent="0">
+              <a:buNone/>
+            </a:pPr>
+            <a:r>
+              <a:rPr lang="en-US" sz="2800" dirty="0"/>
+              <a:t>Once you've designed an algorithm, you can test it to make sure that it's correct and that it meets all of the requirements of the problem.</a:t>
+            </a:r>
+          </a:p>
+          <a:p>
+            <a:endParaRPr lang="en-US" sz="2800" dirty="0"/>
+          </a:p>
+        </p:txBody>
+      </p:sp>
+    </p:spTree>
+    <p:extLst>
+      <p:ext uri="{BB962C8B-B14F-4D97-AF65-F5344CB8AC3E}">
+        <p14:creationId xmlns:p14="http://schemas.microsoft.com/office/powerpoint/2010/main" val="3062790388"/>
       </p:ext>
     </p:extLst>
   </p:cSld>
